--- a/outdoor_seld_e2e/md/seminar/図_実録タイムライン_2026-08-13.pptx
+++ b/outdoor_seld_e2e/md/seminar/図_実録タイムライン_2026-08-13.pptx
@@ -3921,7 +3921,7 @@
                 <a:latin typeface="Meiryo"/>
                 <a:ea typeface="メイリオ"/>
               </a:rPr>
-              <a:t>実働2日＋注釈半日・計65本（計画値）</a:t>
+              <a:t>実働3日＋注釈1日・計120本＝共通100＋歩行対比20（計画値）</a:t>
             </a:r>
             <a:r>
               <a:rPr sz="1050" b="0">
